--- a/it/slides/20-Architettura_dei_Calcolatori-Scheda_Video-Lab.pptx
+++ b/it/slides/20-Architettura_dei_Calcolatori-Scheda_Video-Lab.pptx
@@ -117,24 +117,24 @@
   <p:extLst>
     <p:ext uri="{521415D9-36F7-43E2-AB2F-B90AF26B5E84}">
       <p14:sectionLst xmlns:p14="http://schemas.microsoft.com/office/powerpoint/2010/main">
-        <p14:section name="Apertura" id="{afb29a5e-f039-29d5-a9d9-811c2ac47751}">
+        <p14:section name="Apertura" id="{1c35cc2a-d6fb-8ef6-7ed6-43e8204e027d}">
           <p14:sldIdLst>
             <p14:sldId id="256"/>
             <p14:sldId id="257"/>
           </p14:sldIdLst>
         </p14:section>
-        <p14:section name="Riscaldamento sulla macchina" id="{0de8a48d-ae1b-8867-90ec-10772f0811ae}">
+        <p14:section name="Riscaldamento sulla macchina" id="{7aec510c-eabf-12f2-a1d2-3392c23ac4fe}">
           <p14:sldIdLst>
             <p14:sldId id="258"/>
           </p14:sldIdLst>
         </p14:section>
-        <p14:section name="Il programma completo" id="{dd0579d7-a3ca-d8c3-4208-a97568fd4052}">
+        <p14:section name="Il programma completo" id="{1ba3d9b6-7d9e-d7f2-9f32-f44ded1db071}">
           <p14:sldIdLst>
             <p14:sldId id="259"/>
             <p14:sldId id="260"/>
           </p14:sldIdLst>
         </p14:section>
-        <p14:section name="Eseguire e provare" id="{a159d8a2-9bb2-833f-d0f5-35322b6d7b7a}">
+        <p14:section name="Eseguire e provare" id="{cd9a533c-d2d2-f187-4448-dd3ad7ad80e6}">
           <p14:sldIdLst>
             <p14:sldId id="261"/>
             <p14:sldId id="262"/>
@@ -143,7 +143,7 @@
             <p14:sldId id="265"/>
           </p14:sldIdLst>
         </p14:section>
-        <p14:section name="Esercizi" id="{f87194f1-57cf-8753-1e51-64350f165346}">
+        <p14:section name="Esercizi" id="{1e0accbc-95c5-4211-0da3-65048ce91b94}">
           <p14:sldIdLst>
             <p14:sldId id="266"/>
           </p14:sldIdLst>

--- a/it/slides/20-Architettura_dei_Calcolatori-Scheda_Video-Lab.pptx
+++ b/it/slides/20-Architettura_dei_Calcolatori-Scheda_Video-Lab.pptx
@@ -117,24 +117,24 @@
   <p:extLst>
     <p:ext uri="{521415D9-36F7-43E2-AB2F-B90AF26B5E84}">
       <p14:sectionLst xmlns:p14="http://schemas.microsoft.com/office/powerpoint/2010/main">
-        <p14:section name="Apertura" id="{1c35cc2a-d6fb-8ef6-7ed6-43e8204e027d}">
+        <p14:section name="Apertura" id="{7475745f-6dcd-6cee-150b-f9727d692271}">
           <p14:sldIdLst>
             <p14:sldId id="256"/>
             <p14:sldId id="257"/>
           </p14:sldIdLst>
         </p14:section>
-        <p14:section name="Riscaldamento sulla macchina" id="{7aec510c-eabf-12f2-a1d2-3392c23ac4fe}">
+        <p14:section name="Riscaldamento sulla macchina" id="{63d31828-34b9-5644-08ab-a94b58512f09}">
           <p14:sldIdLst>
             <p14:sldId id="258"/>
           </p14:sldIdLst>
         </p14:section>
-        <p14:section name="Il programma completo" id="{1ba3d9b6-7d9e-d7f2-9f32-f44ded1db071}">
+        <p14:section name="Il programma completo" id="{4f81135f-6dbd-f884-2dc2-7bcd51ad66cd}">
           <p14:sldIdLst>
             <p14:sldId id="259"/>
             <p14:sldId id="260"/>
           </p14:sldIdLst>
         </p14:section>
-        <p14:section name="Eseguire e provare" id="{cd9a533c-d2d2-f187-4448-dd3ad7ad80e6}">
+        <p14:section name="Eseguire e provare" id="{83fb5032-6a3c-3912-6cf0-bbc213bed431}">
           <p14:sldIdLst>
             <p14:sldId id="261"/>
             <p14:sldId id="262"/>
@@ -143,7 +143,7 @@
             <p14:sldId id="265"/>
           </p14:sldIdLst>
         </p14:section>
-        <p14:section name="Esercizi" id="{1e0accbc-95c5-4211-0da3-65048ce91b94}">
+        <p14:section name="Esercizi" id="{a0ca50af-5132-35db-4982-6689d93e2458}">
           <p14:sldIdLst>
             <p14:sldId id="266"/>
           </p14:sldIdLst>
@@ -554,7 +554,8 @@
               <a:rPr lang="en-US" dirty="0"/>
               <a:t>Questa è la presentazione del codice della Lezione 20. Mentre la presentazione della lezione sviluppa i concetti, questa raccoglie tutto ciò che si scrive e si esegue: ogni listato con il suo commento, il programma completo della lezione, il risultato che deve produrre, e la procedura per provarlo su ciascuno dei tre host. Le due presentazioni vanno lette insieme: i concetti spiegano il codice, e il codice dà ai concetti una conseguenza osservabile.
 Stato di apprendimento: DA COMPRENDERE OGGI, alla fine di questa lezione lo spiegate, lo seguite passo passo e lo applicate da soli; DA UTILIZZARE OGGI, oggi seguite e usate la ricetta; come funziona dentro si spiega più avanti, o non fa parte del corso; DA COMPRENDERE PIÙ AVANTI, riconoscete il nome e lo scopo; lo spiega una lezione successiva. Una slide senza etichetta è contesto: una storia, un esempio, una domanda, un esercizio.
-Stato di apprendimento di questa lezione. DA COMPRENDERE OGGI: il frame buffer; i controllori delle periferiche; bus e banda; la scheda video; GPU e GPGPU. DA UTILIZZARE OGGI: il programma completo, gli strumenti di PRG32 (si usa, non si studia, in questo corso). DA COMPRENDERE PIÙ AVANTI: niente. Una slide senza etichetta è contesto: una storia, un esempio, una domanda, un esercizio.</a:t>
+Stato di apprendimento di questa lezione. DA COMPRENDERE OGGI: il frame buffer; i controllori delle periferiche; bus e banda; la scheda video; GPU e GPGPU. DA UTILIZZARE OGGI: il programma completo, gli strumenti di PRG32 (si usa, non si studia, in questo corso). DA COMPRENDERE PIÙ AVANTI: niente. Una slide senza etichetta è contesto: una storia, un esempio, una domanda, un esercizio.
+Percorso. I risultati di oggi: (1) spiegare perché i dispositivi stanno dietro ai controllori e come il processore dialoga con loro; (2) calcolare la dimensione di un frame buffer e la banda di un segnale video; (3) descrivere che cosa fanno una scheda video e una GPU. Si appoggia su: solo ciò che ha preparato la Lezione 01. Prossimo passo: Lezione 21, Ingresso e uscita.</a:t>
             </a:r>
             <a:endParaRPr lang="en-US" dirty="0"/>
           </a:p>
